--- a/media/exports/reports/2026-07/cost-to-win.pptx
+++ b/media/exports/reports/2026-07/cost-to-win.pptx
@@ -4178,39 +4178,7 @@
                 </a:solidFill>
                 <a:latin typeface="Roboto"/>
               </a:rPr>
-              <a:t>June 2026: Locked. June 2026 is locked (closed 2 Jul 2026). These numbers won't change.</a:t>
-            </a:r>
-          </a:p>
-          <a:p>
-            <a:pPr>
-              <a:defRPr>
-                <a:latin typeface="Roboto"/>
-              </a:defRPr>
-            </a:pPr>
-            <a:r>
-              <a:rPr sz="1100" b="0">
-                <a:solidFill>
-                  <a:srgbClr val="5F6F63"/>
-                </a:solidFill>
-                <a:latin typeface="Roboto"/>
-              </a:rPr>
               <a:t>July 2026: Locked. July 2026 is locked (closed 4 Aug 2026). These numbers won't change.</a:t>
-            </a:r>
-          </a:p>
-          <a:p>
-            <a:pPr>
-              <a:defRPr>
-                <a:latin typeface="Roboto"/>
-              </a:defRPr>
-            </a:pPr>
-            <a:r>
-              <a:rPr sz="1100" b="0">
-                <a:solidFill>
-                  <a:srgbClr val="5F6F63"/>
-                </a:solidFill>
-                <a:latin typeface="Roboto"/>
-              </a:rPr>
-              <a:t>October 2026: Incomplete. October 2026 is still in progress: figures to 6 Oct only.</a:t>
             </a:r>
           </a:p>
         </p:txBody>
@@ -4288,7 +4256,7 @@
                 </a:solidFill>
                 <a:latin typeface="Roboto"/>
               </a:rPr>
-              <a:t>Data retrieved 2pm, Tue 6 Oct 2026 · Generated 10 Oct 2026, 9:55pm · Sample data · Made with Python (python-pptx)</a:t>
+              <a:t>Data retrieved 2pm, Tue 6 Oct 2026 · Generated 22 Oct 2026, 4:57pm · Sample data · Made with Python (python-pptx)</a:t>
             </a:r>
           </a:p>
         </p:txBody>
@@ -5355,7 +5323,7 @@
                 </a:solidFill>
                 <a:latin typeface="Roboto"/>
               </a:rPr>
-              <a:t>Data retrieved 2pm, Tue 6 Oct 2026 · Generated 10 Oct 2026, 9:55pm · Sample data · Made with Python (python-pptx)</a:t>
+              <a:t>Data retrieved 2pm, Tue 6 Oct 2026 · Generated 22 Oct 2026, 4:57pm · Sample data · Made with Python (python-pptx)</a:t>
             </a:r>
           </a:p>
         </p:txBody>

--- a/media/exports/reports/2026-07/cost-to-win.pptx
+++ b/media/exports/reports/2026-07/cost-to-win.pptx
@@ -3916,62 +3916,30 @@
           </a:p>
         </p:txBody>
       </p:sp>
-      <p:sp>
-        <p:nvSpPr>
-          <p:cNvPr id="3" name="Rectangle 2"/>
-          <p:cNvSpPr/>
+      <p:pic>
+        <p:nvPicPr>
+          <p:cNvPr id="3" name="Picture 2" descr="mark-4th-180.png"/>
+          <p:cNvPicPr>
+            <a:picLocks noChangeAspect="1"/>
+          </p:cNvPicPr>
           <p:nvPr/>
-        </p:nvSpPr>
-        <p:spPr>
-          <a:xfrm>
-            <a:off x="457200" y="548640"/>
-            <a:ext cx="640080" cy="640080"/>
+        </p:nvPicPr>
+        <p:blipFill>
+          <a:blip r:embed="rId2"/>
+          <a:stretch>
+            <a:fillRect/>
+          </a:stretch>
+        </p:blipFill>
+        <p:spPr>
+          <a:xfrm>
+            <a:off x="365760" y="457200"/>
+            <a:ext cx="822960" cy="822960"/>
           </a:xfrm>
           <a:prstGeom prst="rect">
             <a:avLst/>
           </a:prstGeom>
-          <a:solidFill>
-            <a:srgbClr val="2F7A5D"/>
-          </a:solidFill>
-          <a:ln>
-            <a:noFill/>
-          </a:ln>
-        </p:spPr>
-        <p:style>
-          <a:lnRef idx="1">
-            <a:schemeClr val="accent1"/>
-          </a:lnRef>
-          <a:fillRef idx="3">
-            <a:schemeClr val="accent1"/>
-          </a:fillRef>
-          <a:effectRef idx="2">
-            <a:schemeClr val="accent1"/>
-          </a:effectRef>
-          <a:fontRef idx="minor">
-            <a:schemeClr val="lt1"/>
-          </a:fontRef>
-        </p:style>
-        <p:txBody>
-          <a:bodyPr rtlCol="0" anchor="ctr"/>
-          <a:lstStyle/>
-          <a:p>
-            <a:pPr>
-              <a:defRPr>
-                <a:latin typeface="Roboto"/>
-              </a:defRPr>
-            </a:pPr>
-            <a:r>
-              <a:rPr sz="1600" b="1">
-                <a:solidFill>
-                  <a:srgbClr val="FFFFFF"/>
-                </a:solidFill>
-                <a:latin typeface="Roboto"/>
-              </a:rPr>
-              <a:t>4th</a:t>
-            </a:r>
-          </a:p>
-        </p:txBody>
-      </p:sp>
+        </p:spPr>
+      </p:pic>
       <p:sp>
         <p:nvSpPr>
           <p:cNvPr id="4" name="TextBox 3"/>
@@ -4256,7 +4224,7 @@
                 </a:solidFill>
                 <a:latin typeface="Roboto"/>
               </a:rPr>
-              <a:t>Data retrieved 2pm, Tue 6 Oct 2026 · Generated 22 Oct 2026, 4:57pm · Sample data · Made with Python (python-pptx)</a:t>
+              <a:t>Data retrieved 2pm, Tue 6 Oct 2026 · Generated 28 Oct 2026, 12:45pm · Sample data · Made with Python (python-pptx)</a:t>
             </a:r>
           </a:p>
         </p:txBody>
@@ -5323,7 +5291,7 @@
                 </a:solidFill>
                 <a:latin typeface="Roboto"/>
               </a:rPr>
-              <a:t>Data retrieved 2pm, Tue 6 Oct 2026 · Generated 22 Oct 2026, 4:57pm · Sample data · Made with Python (python-pptx)</a:t>
+              <a:t>Data retrieved 2pm, Tue 6 Oct 2026 · Generated 28 Oct 2026, 12:45pm · Sample data · Made with Python (python-pptx)</a:t>
             </a:r>
           </a:p>
         </p:txBody>
